--- a/内定者スライド.pptx
+++ b/内定者スライド.pptx
@@ -5,9 +5,9 @@
     <p:sldMasterId id="2147483648" r:id="rId1"/>
   </p:sldMasterIdLst>
   <p:sldIdLst>
-    <p:sldId id="256" r:id="rId2"/>
-    <p:sldId id="258" r:id="rId3"/>
-    <p:sldId id="259" r:id="rId4"/>
+    <p:sldId id="258" r:id="rId2"/>
+    <p:sldId id="259" r:id="rId3"/>
+    <p:sldId id="260" r:id="rId4"/>
   </p:sldIdLst>
   <p:sldSz cx="12192000" cy="6858000"/>
   <p:notesSz cx="6858000" cy="9144000"/>
@@ -3618,10 +3618,10 @@
       </p:grpSpPr>
       <p:pic>
         <p:nvPicPr>
-          <p:cNvPr id="5" name="図 4">
-            <a:extLst>
-              <a:ext uri="{FF2B5EF4-FFF2-40B4-BE49-F238E27FC236}">
-                <a16:creationId xmlns:a16="http://schemas.microsoft.com/office/drawing/2014/main" id="{0228D310-803B-440C-B08F-F5E074205DDA}"/>
+          <p:cNvPr id="3" name="図 2">
+            <a:extLst>
+              <a:ext uri="{FF2B5EF4-FFF2-40B4-BE49-F238E27FC236}">
+                <a16:creationId xmlns:a16="http://schemas.microsoft.com/office/drawing/2014/main" id="{8D187E2E-F71B-4F15-9641-1CB748279C32}"/>
               </a:ext>
             </a:extLst>
           </p:cNvPr>
@@ -3654,46 +3654,10 @@
       </p:pic>
       <p:sp>
         <p:nvSpPr>
-          <p:cNvPr id="7" name="テキスト ボックス 6">
-            <a:extLst>
-              <a:ext uri="{FF2B5EF4-FFF2-40B4-BE49-F238E27FC236}">
-                <a16:creationId xmlns:a16="http://schemas.microsoft.com/office/drawing/2014/main" id="{4310A22F-F104-4D97-A10D-ADD4FAE42218}"/>
-              </a:ext>
-            </a:extLst>
-          </p:cNvPr>
-          <p:cNvSpPr txBox="1"/>
-          <p:nvPr/>
-        </p:nvSpPr>
-        <p:spPr>
-          <a:xfrm>
-            <a:off x="6602008" y="3623930"/>
-            <a:ext cx="4229043" cy="1569660"/>
-          </a:xfrm>
-          <a:prstGeom prst="rect">
-            <a:avLst/>
-          </a:prstGeom>
-          <a:noFill/>
-        </p:spPr>
-        <p:txBody>
-          <a:bodyPr wrap="none" rtlCol="0">
-            <a:spAutoFit/>
-          </a:bodyPr>
-          <a:lstStyle/>
-          <a:p>
-            <a:r>
-              <a:rPr kumimoji="1" lang="ja-JP" altLang="en-US" sz="9600" b="1" dirty="0"/>
-              <a:t>井上 恋</a:t>
-            </a:r>
-            <a:endParaRPr kumimoji="1" lang="ja-JP" altLang="en-US" b="1" dirty="0"/>
-          </a:p>
-        </p:txBody>
-      </p:sp>
-      <p:sp>
-        <p:nvSpPr>
-          <p:cNvPr id="8" name="テキスト ボックス 7">
-            <a:extLst>
-              <a:ext uri="{FF2B5EF4-FFF2-40B4-BE49-F238E27FC236}">
-                <a16:creationId xmlns:a16="http://schemas.microsoft.com/office/drawing/2014/main" id="{73889880-A2A7-4386-AC0C-74775056816E}"/>
+          <p:cNvPr id="6" name="テキスト ボックス 5">
+            <a:extLst>
+              <a:ext uri="{FF2B5EF4-FFF2-40B4-BE49-F238E27FC236}">
+                <a16:creationId xmlns:a16="http://schemas.microsoft.com/office/drawing/2014/main" id="{18BF4965-C312-442E-B46E-B8156A4988BE}"/>
               </a:ext>
             </a:extLst>
           </p:cNvPr>
@@ -3718,7 +3682,7 @@
           <a:p>
             <a:r>
               <a:rPr kumimoji="1" lang="en-US" altLang="ja-JP" sz="5400" b="1" dirty="0"/>
-              <a:t>27</a:t>
+              <a:t>26</a:t>
             </a:r>
             <a:r>
               <a:rPr kumimoji="1" lang="ja-JP" altLang="en-US" sz="5400" b="1" dirty="0"/>
@@ -3738,7 +3702,7 @@
                   <a:srgbClr val="FF0000"/>
                 </a:solidFill>
               </a:rPr>
-              <a:t>最優秀者</a:t>
+              <a:t>最速内定</a:t>
             </a:r>
             <a:endParaRPr kumimoji="1" lang="ja-JP" altLang="en-US" sz="5400" b="1" dirty="0">
               <a:solidFill>
@@ -3748,10 +3712,46 @@
           </a:p>
         </p:txBody>
       </p:sp>
+      <p:sp>
+        <p:nvSpPr>
+          <p:cNvPr id="7" name="テキスト ボックス 6">
+            <a:extLst>
+              <a:ext uri="{FF2B5EF4-FFF2-40B4-BE49-F238E27FC236}">
+                <a16:creationId xmlns:a16="http://schemas.microsoft.com/office/drawing/2014/main" id="{F429C6DF-A6AE-4BA9-9C44-20CEBB60EA0B}"/>
+              </a:ext>
+            </a:extLst>
+          </p:cNvPr>
+          <p:cNvSpPr txBox="1"/>
+          <p:nvPr/>
+        </p:nvSpPr>
+        <p:spPr>
+          <a:xfrm>
+            <a:off x="5973631" y="3613298"/>
+            <a:ext cx="5460149" cy="1569660"/>
+          </a:xfrm>
+          <a:prstGeom prst="rect">
+            <a:avLst/>
+          </a:prstGeom>
+          <a:noFill/>
+        </p:spPr>
+        <p:txBody>
+          <a:bodyPr wrap="none" rtlCol="0">
+            <a:spAutoFit/>
+          </a:bodyPr>
+          <a:lstStyle/>
+          <a:p>
+            <a:r>
+              <a:rPr kumimoji="1" lang="ja-JP" altLang="en-US" sz="9600" b="1" dirty="0"/>
+              <a:t>田代 昂汰</a:t>
+            </a:r>
+            <a:endParaRPr kumimoji="1" lang="ja-JP" altLang="en-US" b="1" dirty="0"/>
+          </a:p>
+        </p:txBody>
+      </p:sp>
     </p:spTree>
     <p:extLst>
       <p:ext uri="{BB962C8B-B14F-4D97-AF65-F5344CB8AC3E}">
-        <p14:creationId xmlns:p14="http://schemas.microsoft.com/office/powerpoint/2010/main" val="108403867"/>
+        <p14:creationId xmlns:p14="http://schemas.microsoft.com/office/powerpoint/2010/main" val="300114684"/>
       </p:ext>
     </p:extLst>
   </p:cSld>
@@ -3780,10 +3780,10 @@
       </p:grpSpPr>
       <p:pic>
         <p:nvPicPr>
-          <p:cNvPr id="3" name="図 2">
-            <a:extLst>
-              <a:ext uri="{FF2B5EF4-FFF2-40B4-BE49-F238E27FC236}">
-                <a16:creationId xmlns:a16="http://schemas.microsoft.com/office/drawing/2014/main" id="{8D187E2E-F71B-4F15-9641-1CB748279C32}"/>
+          <p:cNvPr id="9" name="図 8">
+            <a:extLst>
+              <a:ext uri="{FF2B5EF4-FFF2-40B4-BE49-F238E27FC236}">
+                <a16:creationId xmlns:a16="http://schemas.microsoft.com/office/drawing/2014/main" id="{A75E03B2-2C27-4418-A95B-508F6EC2C5AD}"/>
               </a:ext>
             </a:extLst>
           </p:cNvPr>
@@ -3806,8 +3806,47 @@
         </p:blipFill>
         <p:spPr>
           <a:xfrm>
-            <a:off x="0" y="0"/>
-            <a:ext cx="5143500" cy="6858000"/>
+            <a:off x="6142675" y="-125988"/>
+            <a:ext cx="6049325" cy="7109975"/>
+          </a:xfrm>
+          <a:prstGeom prst="rect">
+            <a:avLst/>
+          </a:prstGeom>
+          <a:effectLst>
+            <a:softEdge rad="1270000"/>
+          </a:effectLst>
+        </p:spPr>
+      </p:pic>
+      <p:pic>
+        <p:nvPicPr>
+          <p:cNvPr id="4" name="図 3">
+            <a:extLst>
+              <a:ext uri="{FF2B5EF4-FFF2-40B4-BE49-F238E27FC236}">
+                <a16:creationId xmlns:a16="http://schemas.microsoft.com/office/drawing/2014/main" id="{624BFFF9-C672-4217-9794-2BF54E787196}"/>
+              </a:ext>
+            </a:extLst>
+          </p:cNvPr>
+          <p:cNvPicPr>
+            <a:picLocks noChangeAspect="1"/>
+          </p:cNvPicPr>
+          <p:nvPr/>
+        </p:nvPicPr>
+        <p:blipFill>
+          <a:blip r:embed="rId3">
+            <a:extLst>
+              <a:ext uri="{28A0092B-C50C-407E-A947-70E740481C1C}">
+                <a14:useLocalDpi xmlns:a14="http://schemas.microsoft.com/office/drawing/2010/main" val="0"/>
+              </a:ext>
+            </a:extLst>
+          </a:blip>
+          <a:stretch>
+            <a:fillRect/>
+          </a:stretch>
+        </p:blipFill>
+        <p:spPr>
+          <a:xfrm>
+            <a:off x="155944" y="1681501"/>
+            <a:ext cx="2442949" cy="3257265"/>
           </a:xfrm>
           <a:prstGeom prst="rect">
             <a:avLst/>
@@ -3819,7 +3858,7 @@
           <p:cNvPr id="6" name="テキスト ボックス 5">
             <a:extLst>
               <a:ext uri="{FF2B5EF4-FFF2-40B4-BE49-F238E27FC236}">
-                <a16:creationId xmlns:a16="http://schemas.microsoft.com/office/drawing/2014/main" id="{18BF4965-C312-442E-B46E-B8156A4988BE}"/>
+                <a16:creationId xmlns:a16="http://schemas.microsoft.com/office/drawing/2014/main" id="{1E14BCB6-8868-4FF8-AECA-98BC5EF508B5}"/>
               </a:ext>
             </a:extLst>
           </p:cNvPr>
@@ -3828,8 +3867,8 @@
         </p:nvSpPr>
         <p:spPr>
           <a:xfrm>
-            <a:off x="5674672" y="1366284"/>
-            <a:ext cx="6058069" cy="1200329"/>
+            <a:off x="155944" y="5411946"/>
+            <a:ext cx="3812262" cy="1107996"/>
           </a:xfrm>
           <a:prstGeom prst="rect">
             <a:avLst/>
@@ -3843,30 +3882,109 @@
           <a:lstStyle/>
           <a:p>
             <a:r>
-              <a:rPr kumimoji="1" lang="en-US" altLang="ja-JP" sz="5400" b="1" dirty="0"/>
-              <a:t>26</a:t>
-            </a:r>
-            <a:r>
-              <a:rPr kumimoji="1" lang="ja-JP" altLang="en-US" sz="5400" b="1" dirty="0"/>
-              <a:t>卒</a:t>
-            </a:r>
-            <a:r>
-              <a:rPr kumimoji="1" lang="ja-JP" altLang="en-US" sz="5400" b="1" dirty="0">
+              <a:rPr kumimoji="1" lang="ja-JP" altLang="en-US" sz="6600" b="1" dirty="0"/>
+              <a:t>廣本 勝志</a:t>
+            </a:r>
+            <a:endParaRPr kumimoji="1" lang="ja-JP" altLang="en-US" sz="1100" b="1" dirty="0"/>
+          </a:p>
+        </p:txBody>
+      </p:sp>
+      <p:pic>
+        <p:nvPicPr>
+          <p:cNvPr id="3" name="図 2">
+            <a:extLst>
+              <a:ext uri="{FF2B5EF4-FFF2-40B4-BE49-F238E27FC236}">
+                <a16:creationId xmlns:a16="http://schemas.microsoft.com/office/drawing/2014/main" id="{94AB6A95-5CD6-4F7F-9585-7112DCFC319D}"/>
+              </a:ext>
+            </a:extLst>
+          </p:cNvPr>
+          <p:cNvPicPr>
+            <a:picLocks noChangeAspect="1"/>
+          </p:cNvPicPr>
+          <p:nvPr/>
+        </p:nvPicPr>
+        <p:blipFill>
+          <a:blip r:embed="rId4">
+            <a:extLst>
+              <a:ext uri="{28A0092B-C50C-407E-A947-70E740481C1C}">
+                <a14:useLocalDpi xmlns:a14="http://schemas.microsoft.com/office/drawing/2010/main" val="0"/>
+              </a:ext>
+            </a:extLst>
+          </a:blip>
+          <a:stretch>
+            <a:fillRect/>
+          </a:stretch>
+        </p:blipFill>
+        <p:spPr>
+          <a:xfrm>
+            <a:off x="2947744" y="2389945"/>
+            <a:ext cx="8943389" cy="1639621"/>
+          </a:xfrm>
+          <a:prstGeom prst="rect">
+            <a:avLst/>
+          </a:prstGeom>
+          <a:ln>
+            <a:noFill/>
+          </a:ln>
+          <a:effectLst>
+            <a:outerShdw blurRad="190500" algn="tl" rotWithShape="0">
+              <a:srgbClr val="000000">
+                <a:alpha val="70000"/>
+              </a:srgbClr>
+            </a:outerShdw>
+          </a:effectLst>
+        </p:spPr>
+      </p:pic>
+      <p:sp>
+        <p:nvSpPr>
+          <p:cNvPr id="7" name="テキスト ボックス 6">
+            <a:extLst>
+              <a:ext uri="{FF2B5EF4-FFF2-40B4-BE49-F238E27FC236}">
+                <a16:creationId xmlns:a16="http://schemas.microsoft.com/office/drawing/2014/main" id="{321EDBDE-EE1B-4C8A-BFE1-58A16435C490}"/>
+              </a:ext>
+            </a:extLst>
+          </p:cNvPr>
+          <p:cNvSpPr txBox="1"/>
+          <p:nvPr/>
+        </p:nvSpPr>
+        <p:spPr>
+          <a:xfrm>
+            <a:off x="-47985" y="0"/>
+            <a:ext cx="2646878" cy="1569660"/>
+          </a:xfrm>
+          <a:prstGeom prst="rect">
+            <a:avLst/>
+          </a:prstGeom>
+        </p:spPr>
+        <p:style>
+          <a:lnRef idx="2">
+            <a:schemeClr val="accent2"/>
+          </a:lnRef>
+          <a:fillRef idx="1">
+            <a:schemeClr val="lt1"/>
+          </a:fillRef>
+          <a:effectRef idx="0">
+            <a:schemeClr val="accent2"/>
+          </a:effectRef>
+          <a:fontRef idx="minor">
+            <a:schemeClr val="dk1"/>
+          </a:fontRef>
+        </p:style>
+        <p:txBody>
+          <a:bodyPr wrap="none" rtlCol="0">
+            <a:spAutoFit/>
+          </a:bodyPr>
+          <a:lstStyle/>
+          <a:p>
+            <a:r>
+              <a:rPr lang="ja-JP" altLang="en-US" sz="9600" b="1" dirty="0">
                 <a:solidFill>
                   <a:srgbClr val="FF0000"/>
                 </a:solidFill>
               </a:rPr>
-              <a:t>　</a:t>
-            </a:r>
-            <a:r>
-              <a:rPr kumimoji="1" lang="ja-JP" altLang="en-US" sz="7200" b="1" dirty="0">
-                <a:solidFill>
-                  <a:srgbClr val="FF0000"/>
-                </a:solidFill>
-              </a:rPr>
-              <a:t>最速内定</a:t>
-            </a:r>
-            <a:endParaRPr kumimoji="1" lang="ja-JP" altLang="en-US" sz="5400" b="1" dirty="0">
+              <a:t>内定</a:t>
+            </a:r>
+            <a:endParaRPr kumimoji="1" lang="ja-JP" altLang="en-US" sz="9600" b="1" dirty="0">
               <a:solidFill>
                 <a:srgbClr val="FF0000"/>
               </a:solidFill>
@@ -3874,46 +3992,10 @@
           </a:p>
         </p:txBody>
       </p:sp>
-      <p:sp>
-        <p:nvSpPr>
-          <p:cNvPr id="7" name="テキスト ボックス 6">
-            <a:extLst>
-              <a:ext uri="{FF2B5EF4-FFF2-40B4-BE49-F238E27FC236}">
-                <a16:creationId xmlns:a16="http://schemas.microsoft.com/office/drawing/2014/main" id="{F429C6DF-A6AE-4BA9-9C44-20CEBB60EA0B}"/>
-              </a:ext>
-            </a:extLst>
-          </p:cNvPr>
-          <p:cNvSpPr txBox="1"/>
-          <p:nvPr/>
-        </p:nvSpPr>
-        <p:spPr>
-          <a:xfrm>
-            <a:off x="5973631" y="3613298"/>
-            <a:ext cx="5460149" cy="1569660"/>
-          </a:xfrm>
-          <a:prstGeom prst="rect">
-            <a:avLst/>
-          </a:prstGeom>
-          <a:noFill/>
-        </p:spPr>
-        <p:txBody>
-          <a:bodyPr wrap="none" rtlCol="0">
-            <a:spAutoFit/>
-          </a:bodyPr>
-          <a:lstStyle/>
-          <a:p>
-            <a:r>
-              <a:rPr kumimoji="1" lang="ja-JP" altLang="en-US" sz="9600" b="1" dirty="0"/>
-              <a:t>田代 昂汰</a:t>
-            </a:r>
-            <a:endParaRPr kumimoji="1" lang="ja-JP" altLang="en-US" b="1" dirty="0"/>
-          </a:p>
-        </p:txBody>
-      </p:sp>
     </p:spTree>
     <p:extLst>
       <p:ext uri="{BB962C8B-B14F-4D97-AF65-F5344CB8AC3E}">
-        <p14:creationId xmlns:p14="http://schemas.microsoft.com/office/powerpoint/2010/main" val="300114684"/>
+        <p14:creationId xmlns:p14="http://schemas.microsoft.com/office/powerpoint/2010/main" val="3082627423"/>
       </p:ext>
     </p:extLst>
   </p:cSld>
@@ -3942,10 +4024,10 @@
       </p:grpSpPr>
       <p:pic>
         <p:nvPicPr>
-          <p:cNvPr id="4" name="図 3">
-            <a:extLst>
-              <a:ext uri="{FF2B5EF4-FFF2-40B4-BE49-F238E27FC236}">
-                <a16:creationId xmlns:a16="http://schemas.microsoft.com/office/drawing/2014/main" id="{624BFFF9-C672-4217-9794-2BF54E787196}"/>
+          <p:cNvPr id="11" name="図 10">
+            <a:extLst>
+              <a:ext uri="{FF2B5EF4-FFF2-40B4-BE49-F238E27FC236}">
+                <a16:creationId xmlns:a16="http://schemas.microsoft.com/office/drawing/2014/main" id="{CF59B814-63FE-4254-8F13-8FDA84526016}"/>
               </a:ext>
             </a:extLst>
           </p:cNvPr>
@@ -3968,7 +4050,90 @@
         </p:blipFill>
         <p:spPr>
           <a:xfrm>
-            <a:off x="499592" y="1692490"/>
+            <a:off x="6238242" y="0"/>
+            <a:ext cx="5953758" cy="6875009"/>
+          </a:xfrm>
+          <a:prstGeom prst="rect">
+            <a:avLst/>
+          </a:prstGeom>
+          <a:effectLst>
+            <a:softEdge rad="1270000"/>
+          </a:effectLst>
+        </p:spPr>
+      </p:pic>
+      <p:sp>
+        <p:nvSpPr>
+          <p:cNvPr id="7" name="テキスト ボックス 6">
+            <a:extLst>
+              <a:ext uri="{FF2B5EF4-FFF2-40B4-BE49-F238E27FC236}">
+                <a16:creationId xmlns:a16="http://schemas.microsoft.com/office/drawing/2014/main" id="{321EDBDE-EE1B-4C8A-BFE1-58A16435C490}"/>
+              </a:ext>
+            </a:extLst>
+          </p:cNvPr>
+          <p:cNvSpPr txBox="1"/>
+          <p:nvPr/>
+        </p:nvSpPr>
+        <p:spPr>
+          <a:xfrm>
+            <a:off x="343194" y="0"/>
+            <a:ext cx="2646878" cy="1569660"/>
+          </a:xfrm>
+          <a:prstGeom prst="rect">
+            <a:avLst/>
+          </a:prstGeom>
+          <a:noFill/>
+        </p:spPr>
+        <p:txBody>
+          <a:bodyPr wrap="none" rtlCol="0">
+            <a:spAutoFit/>
+          </a:bodyPr>
+          <a:lstStyle/>
+          <a:p>
+            <a:r>
+              <a:rPr lang="ja-JP" altLang="en-US" sz="9600" b="1" dirty="0">
+                <a:solidFill>
+                  <a:srgbClr val="FF0000"/>
+                </a:solidFill>
+              </a:rPr>
+              <a:t>内定</a:t>
+            </a:r>
+            <a:endParaRPr kumimoji="1" lang="ja-JP" altLang="en-US" sz="9600" b="1" dirty="0">
+              <a:solidFill>
+                <a:srgbClr val="FF0000"/>
+              </a:solidFill>
+            </a:endParaRPr>
+          </a:p>
+        </p:txBody>
+      </p:sp>
+      <p:pic>
+        <p:nvPicPr>
+          <p:cNvPr id="8" name="図 7">
+            <a:extLst>
+              <a:ext uri="{FF2B5EF4-FFF2-40B4-BE49-F238E27FC236}">
+                <a16:creationId xmlns:a16="http://schemas.microsoft.com/office/drawing/2014/main" id="{CEF8CAC3-F34A-403A-8D1B-29BC56A20A38}"/>
+              </a:ext>
+            </a:extLst>
+          </p:cNvPr>
+          <p:cNvPicPr>
+            <a:picLocks noChangeAspect="1"/>
+          </p:cNvPicPr>
+          <p:nvPr/>
+        </p:nvPicPr>
+        <p:blipFill>
+          <a:blip r:embed="rId3">
+            <a:extLst>
+              <a:ext uri="{28A0092B-C50C-407E-A947-70E740481C1C}">
+                <a14:useLocalDpi xmlns:a14="http://schemas.microsoft.com/office/drawing/2010/main" val="0"/>
+              </a:ext>
+            </a:extLst>
+          </a:blip>
+          <a:stretch>
+            <a:fillRect/>
+          </a:stretch>
+        </p:blipFill>
+        <p:spPr>
+          <a:xfrm>
+            <a:off x="445159" y="1692490"/>
             <a:ext cx="2442949" cy="3257265"/>
           </a:xfrm>
           <a:prstGeom prst="rect">
@@ -3978,10 +4143,10 @@
       </p:pic>
       <p:sp>
         <p:nvSpPr>
-          <p:cNvPr id="6" name="テキスト ボックス 5">
-            <a:extLst>
-              <a:ext uri="{FF2B5EF4-FFF2-40B4-BE49-F238E27FC236}">
-                <a16:creationId xmlns:a16="http://schemas.microsoft.com/office/drawing/2014/main" id="{1E14BCB6-8868-4FF8-AECA-98BC5EF508B5}"/>
+          <p:cNvPr id="9" name="テキスト ボックス 8">
+            <a:extLst>
+              <a:ext uri="{FF2B5EF4-FFF2-40B4-BE49-F238E27FC236}">
+                <a16:creationId xmlns:a16="http://schemas.microsoft.com/office/drawing/2014/main" id="{11C4DB54-F627-4DF8-8EF3-2EDDD03E8812}"/>
               </a:ext>
             </a:extLst>
           </p:cNvPr>
@@ -3990,8 +4155,8 @@
         </p:nvSpPr>
         <p:spPr>
           <a:xfrm>
-            <a:off x="4189869" y="5305620"/>
-            <a:ext cx="3812262" cy="1107996"/>
+            <a:off x="343194" y="5399393"/>
+            <a:ext cx="4140877" cy="1200329"/>
           </a:xfrm>
           <a:prstGeom prst="rect">
             <a:avLst/>
@@ -4005,19 +4170,19 @@
           <a:lstStyle/>
           <a:p>
             <a:r>
-              <a:rPr kumimoji="1" lang="ja-JP" altLang="en-US" sz="6600" b="1" dirty="0"/>
-              <a:t>廣本 勝志</a:t>
-            </a:r>
-            <a:endParaRPr kumimoji="1" lang="ja-JP" altLang="en-US" sz="1100" b="1" dirty="0"/>
+              <a:rPr kumimoji="1" lang="ja-JP" altLang="en-US" sz="7200" b="1" dirty="0"/>
+              <a:t>田代 昂汰</a:t>
+            </a:r>
+            <a:endParaRPr kumimoji="1" lang="ja-JP" altLang="en-US" sz="1200" b="1" dirty="0"/>
           </a:p>
         </p:txBody>
       </p:sp>
       <p:pic>
         <p:nvPicPr>
-          <p:cNvPr id="3" name="図 2">
-            <a:extLst>
-              <a:ext uri="{FF2B5EF4-FFF2-40B4-BE49-F238E27FC236}">
-                <a16:creationId xmlns:a16="http://schemas.microsoft.com/office/drawing/2014/main" id="{94AB6A95-5CD6-4F7F-9585-7112DCFC319D}"/>
+          <p:cNvPr id="5" name="図 4">
+            <a:extLst>
+              <a:ext uri="{FF2B5EF4-FFF2-40B4-BE49-F238E27FC236}">
+                <a16:creationId xmlns:a16="http://schemas.microsoft.com/office/drawing/2014/main" id="{BF15249E-3C37-48A8-926E-2AA90326B988}"/>
               </a:ext>
             </a:extLst>
           </p:cNvPr>
@@ -4027,7 +4192,7 @@
           <p:nvPr/>
         </p:nvPicPr>
         <p:blipFill>
-          <a:blip r:embed="rId3">
+          <a:blip r:embed="rId4">
             <a:extLst>
               <a:ext uri="{28A0092B-C50C-407E-A947-70E740481C1C}">
                 <a14:useLocalDpi xmlns:a14="http://schemas.microsoft.com/office/drawing/2010/main" val="0"/>
@@ -4040,62 +4205,28 @@
         </p:blipFill>
         <p:spPr>
           <a:xfrm>
-            <a:off x="3092667" y="2347415"/>
-            <a:ext cx="9249459" cy="1695734"/>
+            <a:off x="3386817" y="1899418"/>
+            <a:ext cx="8538558" cy="2843407"/>
           </a:xfrm>
           <a:prstGeom prst="rect">
             <a:avLst/>
           </a:prstGeom>
+          <a:ln>
+            <a:noFill/>
+          </a:ln>
+          <a:effectLst>
+            <a:outerShdw blurRad="190500" algn="tl" rotWithShape="0">
+              <a:srgbClr val="000000">
+                <a:alpha val="70000"/>
+              </a:srgbClr>
+            </a:outerShdw>
+          </a:effectLst>
         </p:spPr>
       </p:pic>
-      <p:sp>
-        <p:nvSpPr>
-          <p:cNvPr id="7" name="テキスト ボックス 6">
-            <a:extLst>
-              <a:ext uri="{FF2B5EF4-FFF2-40B4-BE49-F238E27FC236}">
-                <a16:creationId xmlns:a16="http://schemas.microsoft.com/office/drawing/2014/main" id="{321EDBDE-EE1B-4C8A-BFE1-58A16435C490}"/>
-              </a:ext>
-            </a:extLst>
-          </p:cNvPr>
-          <p:cNvSpPr txBox="1"/>
-          <p:nvPr/>
-        </p:nvSpPr>
-        <p:spPr>
-          <a:xfrm>
-            <a:off x="4772561" y="122830"/>
-            <a:ext cx="2646878" cy="1569660"/>
-          </a:xfrm>
-          <a:prstGeom prst="rect">
-            <a:avLst/>
-          </a:prstGeom>
-          <a:noFill/>
-        </p:spPr>
-        <p:txBody>
-          <a:bodyPr wrap="none" rtlCol="0">
-            <a:spAutoFit/>
-          </a:bodyPr>
-          <a:lstStyle/>
-          <a:p>
-            <a:r>
-              <a:rPr lang="ja-JP" altLang="en-US" sz="9600" b="1" dirty="0">
-                <a:solidFill>
-                  <a:srgbClr val="FF0000"/>
-                </a:solidFill>
-              </a:rPr>
-              <a:t>内定</a:t>
-            </a:r>
-            <a:endParaRPr kumimoji="1" lang="ja-JP" altLang="en-US" sz="9600" b="1" dirty="0">
-              <a:solidFill>
-                <a:srgbClr val="FF0000"/>
-              </a:solidFill>
-            </a:endParaRPr>
-          </a:p>
-        </p:txBody>
-      </p:sp>
     </p:spTree>
     <p:extLst>
       <p:ext uri="{BB962C8B-B14F-4D97-AF65-F5344CB8AC3E}">
-        <p14:creationId xmlns:p14="http://schemas.microsoft.com/office/powerpoint/2010/main" val="3082627423"/>
+        <p14:creationId xmlns:p14="http://schemas.microsoft.com/office/powerpoint/2010/main" val="303040353"/>
       </p:ext>
     </p:extLst>
   </p:cSld>

--- a/内定者スライド.pptx
+++ b/内定者スライド.pptx
@@ -5,9 +5,10 @@
     <p:sldMasterId id="2147483648" r:id="rId1"/>
   </p:sldMasterIdLst>
   <p:sldIdLst>
-    <p:sldId id="258" r:id="rId2"/>
-    <p:sldId id="259" r:id="rId3"/>
-    <p:sldId id="260" r:id="rId4"/>
+    <p:sldId id="259" r:id="rId2"/>
+    <p:sldId id="262" r:id="rId3"/>
+    <p:sldId id="263" r:id="rId4"/>
+    <p:sldId id="261" r:id="rId5"/>
   </p:sldIdLst>
   <p:sldSz cx="12192000" cy="6858000"/>
   <p:notesSz cx="6858000" cy="9144000"/>
@@ -261,7 +262,7 @@
           <a:p>
             <a:fld id="{393431E8-7FDC-4EF7-A301-5C3BAB69FEDB}" type="datetimeFigureOut">
               <a:rPr kumimoji="1" lang="ja-JP" altLang="en-US" smtClean="0"/>
-              <a:t>2025/6/28</a:t>
+              <a:t>2026/5/13</a:t>
             </a:fld>
             <a:endParaRPr kumimoji="1" lang="ja-JP" altLang="en-US"/>
           </a:p>
@@ -491,7 +492,7 @@
           <a:p>
             <a:fld id="{393431E8-7FDC-4EF7-A301-5C3BAB69FEDB}" type="datetimeFigureOut">
               <a:rPr kumimoji="1" lang="ja-JP" altLang="en-US" smtClean="0"/>
-              <a:t>2025/6/28</a:t>
+              <a:t>2026/5/13</a:t>
             </a:fld>
             <a:endParaRPr kumimoji="1" lang="ja-JP" altLang="en-US"/>
           </a:p>
@@ -731,7 +732,7 @@
           <a:p>
             <a:fld id="{393431E8-7FDC-4EF7-A301-5C3BAB69FEDB}" type="datetimeFigureOut">
               <a:rPr kumimoji="1" lang="ja-JP" altLang="en-US" smtClean="0"/>
-              <a:t>2025/6/28</a:t>
+              <a:t>2026/5/13</a:t>
             </a:fld>
             <a:endParaRPr kumimoji="1" lang="ja-JP" altLang="en-US"/>
           </a:p>
@@ -961,7 +962,7 @@
           <a:p>
             <a:fld id="{393431E8-7FDC-4EF7-A301-5C3BAB69FEDB}" type="datetimeFigureOut">
               <a:rPr kumimoji="1" lang="ja-JP" altLang="en-US" smtClean="0"/>
-              <a:t>2025/6/28</a:t>
+              <a:t>2026/5/13</a:t>
             </a:fld>
             <a:endParaRPr kumimoji="1" lang="ja-JP" altLang="en-US"/>
           </a:p>
@@ -1236,7 +1237,7 @@
           <a:p>
             <a:fld id="{393431E8-7FDC-4EF7-A301-5C3BAB69FEDB}" type="datetimeFigureOut">
               <a:rPr kumimoji="1" lang="ja-JP" altLang="en-US" smtClean="0"/>
-              <a:t>2025/6/28</a:t>
+              <a:t>2026/5/13</a:t>
             </a:fld>
             <a:endParaRPr kumimoji="1" lang="ja-JP" altLang="en-US"/>
           </a:p>
@@ -1565,7 +1566,7 @@
           <a:p>
             <a:fld id="{393431E8-7FDC-4EF7-A301-5C3BAB69FEDB}" type="datetimeFigureOut">
               <a:rPr kumimoji="1" lang="ja-JP" altLang="en-US" smtClean="0"/>
-              <a:t>2025/6/28</a:t>
+              <a:t>2026/5/13</a:t>
             </a:fld>
             <a:endParaRPr kumimoji="1" lang="ja-JP" altLang="en-US"/>
           </a:p>
@@ -2041,7 +2042,7 @@
           <a:p>
             <a:fld id="{393431E8-7FDC-4EF7-A301-5C3BAB69FEDB}" type="datetimeFigureOut">
               <a:rPr kumimoji="1" lang="ja-JP" altLang="en-US" smtClean="0"/>
-              <a:t>2025/6/28</a:t>
+              <a:t>2026/5/13</a:t>
             </a:fld>
             <a:endParaRPr kumimoji="1" lang="ja-JP" altLang="en-US"/>
           </a:p>
@@ -2182,7 +2183,7 @@
           <a:p>
             <a:fld id="{393431E8-7FDC-4EF7-A301-5C3BAB69FEDB}" type="datetimeFigureOut">
               <a:rPr kumimoji="1" lang="ja-JP" altLang="en-US" smtClean="0"/>
-              <a:t>2025/6/28</a:t>
+              <a:t>2026/5/13</a:t>
             </a:fld>
             <a:endParaRPr kumimoji="1" lang="ja-JP" altLang="en-US"/>
           </a:p>
@@ -2295,7 +2296,7 @@
           <a:p>
             <a:fld id="{393431E8-7FDC-4EF7-A301-5C3BAB69FEDB}" type="datetimeFigureOut">
               <a:rPr kumimoji="1" lang="ja-JP" altLang="en-US" smtClean="0"/>
-              <a:t>2025/6/28</a:t>
+              <a:t>2026/5/13</a:t>
             </a:fld>
             <a:endParaRPr kumimoji="1" lang="ja-JP" altLang="en-US"/>
           </a:p>
@@ -2638,7 +2639,7 @@
           <a:p>
             <a:fld id="{393431E8-7FDC-4EF7-A301-5C3BAB69FEDB}" type="datetimeFigureOut">
               <a:rPr kumimoji="1" lang="ja-JP" altLang="en-US" smtClean="0"/>
-              <a:t>2025/6/28</a:t>
+              <a:t>2026/5/13</a:t>
             </a:fld>
             <a:endParaRPr kumimoji="1" lang="ja-JP" altLang="en-US"/>
           </a:p>
@@ -2926,7 +2927,7 @@
           <a:p>
             <a:fld id="{393431E8-7FDC-4EF7-A301-5C3BAB69FEDB}" type="datetimeFigureOut">
               <a:rPr kumimoji="1" lang="ja-JP" altLang="en-US" smtClean="0"/>
-              <a:t>2025/6/28</a:t>
+              <a:t>2026/5/13</a:t>
             </a:fld>
             <a:endParaRPr kumimoji="1" lang="ja-JP" altLang="en-US"/>
           </a:p>
@@ -3199,7 +3200,7 @@
           <a:p>
             <a:fld id="{393431E8-7FDC-4EF7-A301-5C3BAB69FEDB}" type="datetimeFigureOut">
               <a:rPr kumimoji="1" lang="ja-JP" altLang="en-US" smtClean="0"/>
-              <a:t>2025/6/28</a:t>
+              <a:t>2026/5/13</a:t>
             </a:fld>
             <a:endParaRPr kumimoji="1" lang="ja-JP" altLang="en-US"/>
           </a:p>
@@ -3618,168 +3619,6 @@
       </p:grpSpPr>
       <p:pic>
         <p:nvPicPr>
-          <p:cNvPr id="3" name="図 2">
-            <a:extLst>
-              <a:ext uri="{FF2B5EF4-FFF2-40B4-BE49-F238E27FC236}">
-                <a16:creationId xmlns:a16="http://schemas.microsoft.com/office/drawing/2014/main" id="{8D187E2E-F71B-4F15-9641-1CB748279C32}"/>
-              </a:ext>
-            </a:extLst>
-          </p:cNvPr>
-          <p:cNvPicPr>
-            <a:picLocks noChangeAspect="1"/>
-          </p:cNvPicPr>
-          <p:nvPr/>
-        </p:nvPicPr>
-        <p:blipFill>
-          <a:blip r:embed="rId2">
-            <a:extLst>
-              <a:ext uri="{28A0092B-C50C-407E-A947-70E740481C1C}">
-                <a14:useLocalDpi xmlns:a14="http://schemas.microsoft.com/office/drawing/2010/main" val="0"/>
-              </a:ext>
-            </a:extLst>
-          </a:blip>
-          <a:stretch>
-            <a:fillRect/>
-          </a:stretch>
-        </p:blipFill>
-        <p:spPr>
-          <a:xfrm>
-            <a:off x="0" y="0"/>
-            <a:ext cx="5143500" cy="6858000"/>
-          </a:xfrm>
-          <a:prstGeom prst="rect">
-            <a:avLst/>
-          </a:prstGeom>
-        </p:spPr>
-      </p:pic>
-      <p:sp>
-        <p:nvSpPr>
-          <p:cNvPr id="6" name="テキスト ボックス 5">
-            <a:extLst>
-              <a:ext uri="{FF2B5EF4-FFF2-40B4-BE49-F238E27FC236}">
-                <a16:creationId xmlns:a16="http://schemas.microsoft.com/office/drawing/2014/main" id="{18BF4965-C312-442E-B46E-B8156A4988BE}"/>
-              </a:ext>
-            </a:extLst>
-          </p:cNvPr>
-          <p:cNvSpPr txBox="1"/>
-          <p:nvPr/>
-        </p:nvSpPr>
-        <p:spPr>
-          <a:xfrm>
-            <a:off x="5674672" y="1366284"/>
-            <a:ext cx="6058069" cy="1200329"/>
-          </a:xfrm>
-          <a:prstGeom prst="rect">
-            <a:avLst/>
-          </a:prstGeom>
-          <a:noFill/>
-        </p:spPr>
-        <p:txBody>
-          <a:bodyPr wrap="none" rtlCol="0">
-            <a:spAutoFit/>
-          </a:bodyPr>
-          <a:lstStyle/>
-          <a:p>
-            <a:r>
-              <a:rPr kumimoji="1" lang="en-US" altLang="ja-JP" sz="5400" b="1" dirty="0"/>
-              <a:t>26</a:t>
-            </a:r>
-            <a:r>
-              <a:rPr kumimoji="1" lang="ja-JP" altLang="en-US" sz="5400" b="1" dirty="0"/>
-              <a:t>卒</a:t>
-            </a:r>
-            <a:r>
-              <a:rPr kumimoji="1" lang="ja-JP" altLang="en-US" sz="5400" b="1" dirty="0">
-                <a:solidFill>
-                  <a:srgbClr val="FF0000"/>
-                </a:solidFill>
-              </a:rPr>
-              <a:t>　</a:t>
-            </a:r>
-            <a:r>
-              <a:rPr kumimoji="1" lang="ja-JP" altLang="en-US" sz="7200" b="1" dirty="0">
-                <a:solidFill>
-                  <a:srgbClr val="FF0000"/>
-                </a:solidFill>
-              </a:rPr>
-              <a:t>最速内定</a:t>
-            </a:r>
-            <a:endParaRPr kumimoji="1" lang="ja-JP" altLang="en-US" sz="5400" b="1" dirty="0">
-              <a:solidFill>
-                <a:srgbClr val="FF0000"/>
-              </a:solidFill>
-            </a:endParaRPr>
-          </a:p>
-        </p:txBody>
-      </p:sp>
-      <p:sp>
-        <p:nvSpPr>
-          <p:cNvPr id="7" name="テキスト ボックス 6">
-            <a:extLst>
-              <a:ext uri="{FF2B5EF4-FFF2-40B4-BE49-F238E27FC236}">
-                <a16:creationId xmlns:a16="http://schemas.microsoft.com/office/drawing/2014/main" id="{F429C6DF-A6AE-4BA9-9C44-20CEBB60EA0B}"/>
-              </a:ext>
-            </a:extLst>
-          </p:cNvPr>
-          <p:cNvSpPr txBox="1"/>
-          <p:nvPr/>
-        </p:nvSpPr>
-        <p:spPr>
-          <a:xfrm>
-            <a:off x="5973631" y="3613298"/>
-            <a:ext cx="5460149" cy="1569660"/>
-          </a:xfrm>
-          <a:prstGeom prst="rect">
-            <a:avLst/>
-          </a:prstGeom>
-          <a:noFill/>
-        </p:spPr>
-        <p:txBody>
-          <a:bodyPr wrap="none" rtlCol="0">
-            <a:spAutoFit/>
-          </a:bodyPr>
-          <a:lstStyle/>
-          <a:p>
-            <a:r>
-              <a:rPr kumimoji="1" lang="ja-JP" altLang="en-US" sz="9600" b="1" dirty="0"/>
-              <a:t>田代 昂汰</a:t>
-            </a:r>
-            <a:endParaRPr kumimoji="1" lang="ja-JP" altLang="en-US" b="1" dirty="0"/>
-          </a:p>
-        </p:txBody>
-      </p:sp>
-    </p:spTree>
-    <p:extLst>
-      <p:ext uri="{BB962C8B-B14F-4D97-AF65-F5344CB8AC3E}">
-        <p14:creationId xmlns:p14="http://schemas.microsoft.com/office/powerpoint/2010/main" val="300114684"/>
-      </p:ext>
-    </p:extLst>
-  </p:cSld>
-  <p:clrMapOvr>
-    <a:masterClrMapping/>
-  </p:clrMapOvr>
-</p:sld>
-</file>
-
-<file path=ppt/slides/slide2.xml><?xml version="1.0" encoding="utf-8"?>
-<p:sld xmlns:a="http://schemas.openxmlformats.org/drawingml/2006/main" xmlns:r="http://schemas.openxmlformats.org/officeDocument/2006/relationships" xmlns:p="http://schemas.openxmlformats.org/presentationml/2006/main">
-  <p:cSld>
-    <p:spTree>
-      <p:nvGrpSpPr>
-        <p:cNvPr id="1" name=""/>
-        <p:cNvGrpSpPr/>
-        <p:nvPr/>
-      </p:nvGrpSpPr>
-      <p:grpSpPr>
-        <a:xfrm>
-          <a:off x="0" y="0"/>
-          <a:ext cx="0" cy="0"/>
-          <a:chOff x="0" y="0"/>
-          <a:chExt cx="0" cy="0"/>
-        </a:xfrm>
-      </p:grpSpPr>
-      <p:pic>
-        <p:nvPicPr>
           <p:cNvPr id="9" name="図 8">
             <a:extLst>
               <a:ext uri="{FF2B5EF4-FFF2-40B4-BE49-F238E27FC236}">
@@ -3845,7 +3684,7 @@
         </p:blipFill>
         <p:spPr>
           <a:xfrm>
-            <a:off x="155944" y="1681501"/>
+            <a:off x="445158" y="1681501"/>
             <a:ext cx="2442949" cy="3257265"/>
           </a:xfrm>
           <a:prstGeom prst="rect">
@@ -3917,7 +3756,7 @@
         </p:blipFill>
         <p:spPr>
           <a:xfrm>
-            <a:off x="2947744" y="2389945"/>
+            <a:off x="3092667" y="2389945"/>
             <a:ext cx="8943389" cy="1639621"/>
           </a:xfrm>
           <a:prstGeom prst="rect">
@@ -3937,10 +3776,10 @@
       </p:pic>
       <p:sp>
         <p:nvSpPr>
-          <p:cNvPr id="7" name="テキスト ボックス 6">
-            <a:extLst>
-              <a:ext uri="{FF2B5EF4-FFF2-40B4-BE49-F238E27FC236}">
-                <a16:creationId xmlns:a16="http://schemas.microsoft.com/office/drawing/2014/main" id="{321EDBDE-EE1B-4C8A-BFE1-58A16435C490}"/>
+          <p:cNvPr id="2" name="テキスト ボックス 1">
+            <a:extLst>
+              <a:ext uri="{FF2B5EF4-FFF2-40B4-BE49-F238E27FC236}">
+                <a16:creationId xmlns:a16="http://schemas.microsoft.com/office/drawing/2014/main" id="{0ABE5982-2BE6-B68B-FB49-2167DD4393E8}"/>
               </a:ext>
             </a:extLst>
           </p:cNvPr>
@@ -3949,27 +3788,14 @@
         </p:nvSpPr>
         <p:spPr>
           <a:xfrm>
-            <a:off x="-47985" y="0"/>
+            <a:off x="343194" y="0"/>
             <a:ext cx="2646878" cy="1569660"/>
           </a:xfrm>
           <a:prstGeom prst="rect">
             <a:avLst/>
           </a:prstGeom>
+          <a:noFill/>
         </p:spPr>
-        <p:style>
-          <a:lnRef idx="2">
-            <a:schemeClr val="accent2"/>
-          </a:lnRef>
-          <a:fillRef idx="1">
-            <a:schemeClr val="lt1"/>
-          </a:fillRef>
-          <a:effectRef idx="0">
-            <a:schemeClr val="accent2"/>
-          </a:effectRef>
-          <a:fontRef idx="minor">
-            <a:schemeClr val="dk1"/>
-          </a:fontRef>
-        </p:style>
         <p:txBody>
           <a:bodyPr wrap="none" rtlCol="0">
             <a:spAutoFit/>
@@ -3996,6 +3822,207 @@
     <p:extLst>
       <p:ext uri="{BB962C8B-B14F-4D97-AF65-F5344CB8AC3E}">
         <p14:creationId xmlns:p14="http://schemas.microsoft.com/office/powerpoint/2010/main" val="3082627423"/>
+      </p:ext>
+    </p:extLst>
+  </p:cSld>
+  <p:clrMapOvr>
+    <a:masterClrMapping/>
+  </p:clrMapOvr>
+</p:sld>
+</file>
+
+<file path=ppt/slides/slide2.xml><?xml version="1.0" encoding="utf-8"?>
+<p:sld xmlns:a="http://schemas.openxmlformats.org/drawingml/2006/main" xmlns:r="http://schemas.openxmlformats.org/officeDocument/2006/relationships" xmlns:p="http://schemas.openxmlformats.org/presentationml/2006/main">
+  <p:cSld>
+    <p:spTree>
+      <p:nvGrpSpPr>
+        <p:cNvPr id="1" name="">
+          <a:extLst>
+            <a:ext uri="{FF2B5EF4-FFF2-40B4-BE49-F238E27FC236}">
+              <a16:creationId xmlns:a16="http://schemas.microsoft.com/office/drawing/2014/main" id="{DC6CE98B-344F-EE4F-701D-77595C1D427E}"/>
+            </a:ext>
+          </a:extLst>
+        </p:cNvPr>
+        <p:cNvGrpSpPr/>
+        <p:nvPr/>
+      </p:nvGrpSpPr>
+      <p:grpSpPr>
+        <a:xfrm>
+          <a:off x="0" y="0"/>
+          <a:ext cx="0" cy="0"/>
+          <a:chOff x="0" y="0"/>
+          <a:chExt cx="0" cy="0"/>
+        </a:xfrm>
+      </p:grpSpPr>
+      <p:sp>
+        <p:nvSpPr>
+          <p:cNvPr id="7" name="テキスト ボックス 6">
+            <a:extLst>
+              <a:ext uri="{FF2B5EF4-FFF2-40B4-BE49-F238E27FC236}">
+                <a16:creationId xmlns:a16="http://schemas.microsoft.com/office/drawing/2014/main" id="{5E087B05-7232-BCA9-68B7-0DE9BC30A7A2}"/>
+              </a:ext>
+            </a:extLst>
+          </p:cNvPr>
+          <p:cNvSpPr txBox="1"/>
+          <p:nvPr/>
+        </p:nvSpPr>
+        <p:spPr>
+          <a:xfrm>
+            <a:off x="343194" y="0"/>
+            <a:ext cx="2646878" cy="1569660"/>
+          </a:xfrm>
+          <a:prstGeom prst="rect">
+            <a:avLst/>
+          </a:prstGeom>
+          <a:noFill/>
+        </p:spPr>
+        <p:txBody>
+          <a:bodyPr wrap="none" rtlCol="0">
+            <a:spAutoFit/>
+          </a:bodyPr>
+          <a:lstStyle/>
+          <a:p>
+            <a:r>
+              <a:rPr lang="ja-JP" altLang="en-US" sz="9600" b="1" dirty="0">
+                <a:solidFill>
+                  <a:srgbClr val="FF0000"/>
+                </a:solidFill>
+              </a:rPr>
+              <a:t>内定</a:t>
+            </a:r>
+            <a:endParaRPr kumimoji="1" lang="ja-JP" altLang="en-US" sz="9600" b="1" dirty="0">
+              <a:solidFill>
+                <a:srgbClr val="FF0000"/>
+              </a:solidFill>
+            </a:endParaRPr>
+          </a:p>
+        </p:txBody>
+      </p:sp>
+      <p:sp>
+        <p:nvSpPr>
+          <p:cNvPr id="9" name="テキスト ボックス 8">
+            <a:extLst>
+              <a:ext uri="{FF2B5EF4-FFF2-40B4-BE49-F238E27FC236}">
+                <a16:creationId xmlns:a16="http://schemas.microsoft.com/office/drawing/2014/main" id="{C7E25CDC-8FCC-17E8-CE87-2CC1F3AD8E2D}"/>
+              </a:ext>
+            </a:extLst>
+          </p:cNvPr>
+          <p:cNvSpPr txBox="1"/>
+          <p:nvPr/>
+        </p:nvSpPr>
+        <p:spPr>
+          <a:xfrm>
+            <a:off x="343194" y="5399393"/>
+            <a:ext cx="3217547" cy="1200329"/>
+          </a:xfrm>
+          <a:prstGeom prst="rect">
+            <a:avLst/>
+          </a:prstGeom>
+          <a:noFill/>
+        </p:spPr>
+        <p:txBody>
+          <a:bodyPr wrap="none" rtlCol="0">
+            <a:spAutoFit/>
+          </a:bodyPr>
+          <a:lstStyle/>
+          <a:p>
+            <a:r>
+              <a:rPr kumimoji="1" lang="ja-JP" altLang="en-US" sz="7200" b="1" dirty="0"/>
+              <a:t>井上 恋</a:t>
+            </a:r>
+            <a:endParaRPr kumimoji="1" lang="ja-JP" altLang="en-US" sz="1200" b="1" dirty="0"/>
+          </a:p>
+        </p:txBody>
+      </p:sp>
+      <p:pic>
+        <p:nvPicPr>
+          <p:cNvPr id="12" name="図 11">
+            <a:extLst>
+              <a:ext uri="{FF2B5EF4-FFF2-40B4-BE49-F238E27FC236}">
+                <a16:creationId xmlns:a16="http://schemas.microsoft.com/office/drawing/2014/main" id="{D8477603-C0A4-3723-09BD-9D7A668D9D4C}"/>
+              </a:ext>
+            </a:extLst>
+          </p:cNvPr>
+          <p:cNvPicPr>
+            <a:picLocks noChangeAspect="1"/>
+          </p:cNvPicPr>
+          <p:nvPr/>
+        </p:nvPicPr>
+        <p:blipFill>
+          <a:blip r:embed="rId2">
+            <a:extLst>
+              <a:ext uri="{28A0092B-C50C-407E-A947-70E740481C1C}">
+                <a14:useLocalDpi xmlns:a14="http://schemas.microsoft.com/office/drawing/2010/main" val="0"/>
+              </a:ext>
+            </a:extLst>
+          </a:blip>
+          <a:stretch>
+            <a:fillRect/>
+          </a:stretch>
+        </p:blipFill>
+        <p:spPr>
+          <a:xfrm>
+            <a:off x="5462586" y="-5407"/>
+            <a:ext cx="6729414" cy="6863407"/>
+          </a:xfrm>
+          <a:prstGeom prst="rect">
+            <a:avLst/>
+          </a:prstGeom>
+          <a:effectLst>
+            <a:outerShdw dist="50800" dir="5400000" algn="ctr" rotWithShape="0">
+              <a:srgbClr val="000000">
+                <a:alpha val="0"/>
+              </a:srgbClr>
+            </a:outerShdw>
+            <a:softEdge rad="1270000"/>
+          </a:effectLst>
+        </p:spPr>
+      </p:pic>
+      <p:pic>
+        <p:nvPicPr>
+          <p:cNvPr id="14" name="図 13">
+            <a:extLst>
+              <a:ext uri="{FF2B5EF4-FFF2-40B4-BE49-F238E27FC236}">
+                <a16:creationId xmlns:a16="http://schemas.microsoft.com/office/drawing/2014/main" id="{4498E9AF-4DC9-7C38-BCA9-41791F83BF26}"/>
+              </a:ext>
+            </a:extLst>
+          </p:cNvPr>
+          <p:cNvPicPr>
+            <a:picLocks noChangeAspect="1"/>
+          </p:cNvPicPr>
+          <p:nvPr/>
+        </p:nvPicPr>
+        <p:blipFill>
+          <a:blip r:embed="rId3">
+            <a:extLst>
+              <a:ext uri="{28A0092B-C50C-407E-A947-70E740481C1C}">
+                <a14:useLocalDpi xmlns:a14="http://schemas.microsoft.com/office/drawing/2010/main" val="0"/>
+              </a:ext>
+            </a:extLst>
+          </a:blip>
+          <a:stretch>
+            <a:fillRect/>
+          </a:stretch>
+        </p:blipFill>
+        <p:spPr>
+          <a:xfrm>
+            <a:off x="2990072" y="-5407"/>
+            <a:ext cx="9144000" cy="6858000"/>
+          </a:xfrm>
+          <a:prstGeom prst="rect">
+            <a:avLst/>
+          </a:prstGeom>
+          <a:effectLst>
+            <a:outerShdw blurRad="50800" dist="50800" dir="5400000" algn="ctr" rotWithShape="0">
+              <a:srgbClr val="000000"/>
+            </a:outerShdw>
+          </a:effectLst>
+        </p:spPr>
+      </p:pic>
+    </p:spTree>
+    <p:extLst>
+      <p:ext uri="{BB962C8B-B14F-4D97-AF65-F5344CB8AC3E}">
+        <p14:creationId xmlns:p14="http://schemas.microsoft.com/office/powerpoint/2010/main" val="1213990616"/>
       </p:ext>
     </p:extLst>
   </p:cSld>
@@ -4010,7 +4037,213 @@
   <p:cSld>
     <p:spTree>
       <p:nvGrpSpPr>
-        <p:cNvPr id="1" name=""/>
+        <p:cNvPr id="1" name="">
+          <a:extLst>
+            <a:ext uri="{FF2B5EF4-FFF2-40B4-BE49-F238E27FC236}">
+              <a16:creationId xmlns:a16="http://schemas.microsoft.com/office/drawing/2014/main" id="{250DE83D-F419-6D26-6887-A8325C73D966}"/>
+            </a:ext>
+          </a:extLst>
+        </p:cNvPr>
+        <p:cNvGrpSpPr/>
+        <p:nvPr/>
+      </p:nvGrpSpPr>
+      <p:grpSpPr>
+        <a:xfrm>
+          <a:off x="0" y="0"/>
+          <a:ext cx="0" cy="0"/>
+          <a:chOff x="0" y="0"/>
+          <a:chExt cx="0" cy="0"/>
+        </a:xfrm>
+      </p:grpSpPr>
+      <p:sp>
+        <p:nvSpPr>
+          <p:cNvPr id="7" name="テキスト ボックス 6">
+            <a:extLst>
+              <a:ext uri="{FF2B5EF4-FFF2-40B4-BE49-F238E27FC236}">
+                <a16:creationId xmlns:a16="http://schemas.microsoft.com/office/drawing/2014/main" id="{8D0F66CE-28F2-7ABC-FC54-584AA1672403}"/>
+              </a:ext>
+            </a:extLst>
+          </p:cNvPr>
+          <p:cNvSpPr txBox="1"/>
+          <p:nvPr/>
+        </p:nvSpPr>
+        <p:spPr>
+          <a:xfrm>
+            <a:off x="343194" y="0"/>
+            <a:ext cx="2646878" cy="1569660"/>
+          </a:xfrm>
+          <a:prstGeom prst="rect">
+            <a:avLst/>
+          </a:prstGeom>
+          <a:noFill/>
+        </p:spPr>
+        <p:txBody>
+          <a:bodyPr wrap="none" rtlCol="0">
+            <a:spAutoFit/>
+          </a:bodyPr>
+          <a:lstStyle/>
+          <a:p>
+            <a:r>
+              <a:rPr lang="ja-JP" altLang="en-US" sz="9600" b="1" dirty="0">
+                <a:solidFill>
+                  <a:srgbClr val="FF0000"/>
+                </a:solidFill>
+              </a:rPr>
+              <a:t>内定</a:t>
+            </a:r>
+            <a:endParaRPr kumimoji="1" lang="ja-JP" altLang="en-US" sz="9600" b="1" dirty="0">
+              <a:solidFill>
+                <a:srgbClr val="FF0000"/>
+              </a:solidFill>
+            </a:endParaRPr>
+          </a:p>
+        </p:txBody>
+      </p:sp>
+      <p:sp>
+        <p:nvSpPr>
+          <p:cNvPr id="3" name="テキスト ボックス 2">
+            <a:extLst>
+              <a:ext uri="{FF2B5EF4-FFF2-40B4-BE49-F238E27FC236}">
+                <a16:creationId xmlns:a16="http://schemas.microsoft.com/office/drawing/2014/main" id="{AB7EB44D-F224-E0D9-AB05-CE31878849D8}"/>
+              </a:ext>
+            </a:extLst>
+          </p:cNvPr>
+          <p:cNvSpPr txBox="1"/>
+          <p:nvPr/>
+        </p:nvSpPr>
+        <p:spPr>
+          <a:xfrm>
+            <a:off x="343194" y="5399393"/>
+            <a:ext cx="4140877" cy="1200329"/>
+          </a:xfrm>
+          <a:prstGeom prst="rect">
+            <a:avLst/>
+          </a:prstGeom>
+          <a:noFill/>
+        </p:spPr>
+        <p:txBody>
+          <a:bodyPr wrap="none" rtlCol="0">
+            <a:spAutoFit/>
+          </a:bodyPr>
+          <a:lstStyle/>
+          <a:p>
+            <a:r>
+              <a:rPr kumimoji="1" lang="ja-JP" altLang="en-US" sz="7200" b="1" dirty="0"/>
+              <a:t>中平 悠希</a:t>
+            </a:r>
+            <a:endParaRPr kumimoji="1" lang="ja-JP" altLang="en-US" sz="1200" b="1" dirty="0"/>
+          </a:p>
+        </p:txBody>
+      </p:sp>
+      <p:pic>
+        <p:nvPicPr>
+          <p:cNvPr id="5" name="図 4">
+            <a:extLst>
+              <a:ext uri="{FF2B5EF4-FFF2-40B4-BE49-F238E27FC236}">
+                <a16:creationId xmlns:a16="http://schemas.microsoft.com/office/drawing/2014/main" id="{DCECDE8C-31A6-6A96-C35F-9705C2816AE6}"/>
+              </a:ext>
+            </a:extLst>
+          </p:cNvPr>
+          <p:cNvPicPr>
+            <a:picLocks noChangeAspect="1"/>
+          </p:cNvPicPr>
+          <p:nvPr/>
+        </p:nvPicPr>
+        <p:blipFill>
+          <a:blip r:embed="rId2">
+            <a:extLst>
+              <a:ext uri="{28A0092B-C50C-407E-A947-70E740481C1C}">
+                <a14:useLocalDpi xmlns:a14="http://schemas.microsoft.com/office/drawing/2010/main" val="0"/>
+              </a:ext>
+            </a:extLst>
+          </a:blip>
+          <a:srcRect l="22116" r="18444"/>
+          <a:stretch>
+            <a:fillRect/>
+          </a:stretch>
+        </p:blipFill>
+        <p:spPr>
+          <a:xfrm>
+            <a:off x="5255502" y="0"/>
+            <a:ext cx="6936498" cy="6858000"/>
+          </a:xfrm>
+          <a:prstGeom prst="rect">
+            <a:avLst/>
+          </a:prstGeom>
+          <a:effectLst>
+            <a:softEdge rad="1270000"/>
+          </a:effectLst>
+        </p:spPr>
+      </p:pic>
+      <p:pic>
+        <p:nvPicPr>
+          <p:cNvPr id="11" name="図 10">
+            <a:extLst>
+              <a:ext uri="{FF2B5EF4-FFF2-40B4-BE49-F238E27FC236}">
+                <a16:creationId xmlns:a16="http://schemas.microsoft.com/office/drawing/2014/main" id="{22C35C21-6D72-DA22-D904-663BE426CE5F}"/>
+              </a:ext>
+            </a:extLst>
+          </p:cNvPr>
+          <p:cNvPicPr>
+            <a:picLocks noChangeAspect="1"/>
+          </p:cNvPicPr>
+          <p:nvPr/>
+        </p:nvPicPr>
+        <p:blipFill>
+          <a:blip r:embed="rId3">
+            <a:extLst>
+              <a:ext uri="{28A0092B-C50C-407E-A947-70E740481C1C}">
+                <a14:useLocalDpi xmlns:a14="http://schemas.microsoft.com/office/drawing/2010/main" val="0"/>
+              </a:ext>
+            </a:extLst>
+          </a:blip>
+          <a:stretch>
+            <a:fillRect/>
+          </a:stretch>
+        </p:blipFill>
+        <p:spPr>
+          <a:xfrm>
+            <a:off x="3149098" y="1028567"/>
+            <a:ext cx="7857204" cy="3928602"/>
+          </a:xfrm>
+          <a:prstGeom prst="rect">
+            <a:avLst/>
+          </a:prstGeom>
+          <a:effectLst>
+            <a:outerShdw blurRad="50800" dist="50800" dir="5400000" algn="ctr" rotWithShape="0">
+              <a:srgbClr val="000000">
+                <a:alpha val="43137"/>
+              </a:srgbClr>
+            </a:outerShdw>
+            <a:softEdge rad="0"/>
+          </a:effectLst>
+        </p:spPr>
+      </p:pic>
+    </p:spTree>
+    <p:extLst>
+      <p:ext uri="{BB962C8B-B14F-4D97-AF65-F5344CB8AC3E}">
+        <p14:creationId xmlns:p14="http://schemas.microsoft.com/office/powerpoint/2010/main" val="278859427"/>
+      </p:ext>
+    </p:extLst>
+  </p:cSld>
+  <p:clrMapOvr>
+    <a:masterClrMapping/>
+  </p:clrMapOvr>
+</p:sld>
+</file>
+
+<file path=ppt/slides/slide4.xml><?xml version="1.0" encoding="utf-8"?>
+<p:sld xmlns:a="http://schemas.openxmlformats.org/drawingml/2006/main" xmlns:r="http://schemas.openxmlformats.org/officeDocument/2006/relationships" xmlns:p="http://schemas.openxmlformats.org/presentationml/2006/main">
+  <p:cSld>
+    <p:spTree>
+      <p:nvGrpSpPr>
+        <p:cNvPr id="1" name="">
+          <a:extLst>
+            <a:ext uri="{FF2B5EF4-FFF2-40B4-BE49-F238E27FC236}">
+              <a16:creationId xmlns:a16="http://schemas.microsoft.com/office/drawing/2014/main" id="{1BE5CF99-E72B-0429-3DEC-CF88452C9AD4}"/>
+            </a:ext>
+          </a:extLst>
+        </p:cNvPr>
         <p:cNvGrpSpPr/>
         <p:nvPr/>
       </p:nvGrpSpPr>
@@ -4027,7 +4260,7 @@
           <p:cNvPr id="11" name="図 10">
             <a:extLst>
               <a:ext uri="{FF2B5EF4-FFF2-40B4-BE49-F238E27FC236}">
-                <a16:creationId xmlns:a16="http://schemas.microsoft.com/office/drawing/2014/main" id="{CF59B814-63FE-4254-8F13-8FDA84526016}"/>
+                <a16:creationId xmlns:a16="http://schemas.microsoft.com/office/drawing/2014/main" id="{1A97BB6A-04EA-ADDF-99FD-C0222AF0A2B2}"/>
               </a:ext>
             </a:extLst>
           </p:cNvPr>
@@ -4066,7 +4299,7 @@
           <p:cNvPr id="7" name="テキスト ボックス 6">
             <a:extLst>
               <a:ext uri="{FF2B5EF4-FFF2-40B4-BE49-F238E27FC236}">
-                <a16:creationId xmlns:a16="http://schemas.microsoft.com/office/drawing/2014/main" id="{321EDBDE-EE1B-4C8A-BFE1-58A16435C490}"/>
+                <a16:creationId xmlns:a16="http://schemas.microsoft.com/office/drawing/2014/main" id="{1C0A16D3-C142-FB5B-AE37-F3900944D027}"/>
               </a:ext>
             </a:extLst>
           </p:cNvPr>
@@ -4110,7 +4343,7 @@
           <p:cNvPr id="8" name="図 7">
             <a:extLst>
               <a:ext uri="{FF2B5EF4-FFF2-40B4-BE49-F238E27FC236}">
-                <a16:creationId xmlns:a16="http://schemas.microsoft.com/office/drawing/2014/main" id="{CEF8CAC3-F34A-403A-8D1B-29BC56A20A38}"/>
+                <a16:creationId xmlns:a16="http://schemas.microsoft.com/office/drawing/2014/main" id="{A5DEBFFD-8476-D41D-9612-DB48BB777D31}"/>
               </a:ext>
             </a:extLst>
           </p:cNvPr>
@@ -4146,7 +4379,7 @@
           <p:cNvPr id="9" name="テキスト ボックス 8">
             <a:extLst>
               <a:ext uri="{FF2B5EF4-FFF2-40B4-BE49-F238E27FC236}">
-                <a16:creationId xmlns:a16="http://schemas.microsoft.com/office/drawing/2014/main" id="{11C4DB54-F627-4DF8-8EF3-2EDDD03E8812}"/>
+                <a16:creationId xmlns:a16="http://schemas.microsoft.com/office/drawing/2014/main" id="{A5D8BBA0-E4D1-7DA2-1888-58646586942F}"/>
               </a:ext>
             </a:extLst>
           </p:cNvPr>
@@ -4182,7 +4415,7 @@
           <p:cNvPr id="5" name="図 4">
             <a:extLst>
               <a:ext uri="{FF2B5EF4-FFF2-40B4-BE49-F238E27FC236}">
-                <a16:creationId xmlns:a16="http://schemas.microsoft.com/office/drawing/2014/main" id="{BF15249E-3C37-48A8-926E-2AA90326B988}"/>
+                <a16:creationId xmlns:a16="http://schemas.microsoft.com/office/drawing/2014/main" id="{52D8010F-1752-75FB-6A68-7C8DBFE769C2}"/>
               </a:ext>
             </a:extLst>
           </p:cNvPr>
@@ -4226,7 +4459,7 @@
     </p:spTree>
     <p:extLst>
       <p:ext uri="{BB962C8B-B14F-4D97-AF65-F5344CB8AC3E}">
-        <p14:creationId xmlns:p14="http://schemas.microsoft.com/office/powerpoint/2010/main" val="303040353"/>
+        <p14:creationId xmlns:p14="http://schemas.microsoft.com/office/powerpoint/2010/main" val="2839903931"/>
       </p:ext>
     </p:extLst>
   </p:cSld>
